--- a/Презентация к курсовой.pptx
+++ b/Презентация к курсовой.pptx
@@ -5,7 +5,7 @@
     <p:sldMasterId id="2147483648" r:id="rId1"/>
   </p:sldMasterIdLst>
   <p:notesMasterIdLst>
-    <p:notesMasterId r:id="rId21"/>
+    <p:notesMasterId r:id="rId28"/>
   </p:notesMasterIdLst>
   <p:sldIdLst>
     <p:sldId id="256" r:id="rId2"/>
@@ -22,11 +22,18 @@
     <p:sldId id="269" r:id="rId13"/>
     <p:sldId id="270" r:id="rId14"/>
     <p:sldId id="271" r:id="rId15"/>
-    <p:sldId id="272" r:id="rId16"/>
-    <p:sldId id="273" r:id="rId17"/>
-    <p:sldId id="274" r:id="rId18"/>
-    <p:sldId id="276" r:id="rId19"/>
-    <p:sldId id="275" r:id="rId20"/>
+    <p:sldId id="277" r:id="rId16"/>
+    <p:sldId id="272" r:id="rId17"/>
+    <p:sldId id="278" r:id="rId18"/>
+    <p:sldId id="273" r:id="rId19"/>
+    <p:sldId id="279" r:id="rId20"/>
+    <p:sldId id="280" r:id="rId21"/>
+    <p:sldId id="281" r:id="rId22"/>
+    <p:sldId id="282" r:id="rId23"/>
+    <p:sldId id="283" r:id="rId24"/>
+    <p:sldId id="274" r:id="rId25"/>
+    <p:sldId id="276" r:id="rId26"/>
+    <p:sldId id="275" r:id="rId27"/>
   </p:sldIdLst>
   <p:sldSz cx="12192000" cy="6858000"/>
   <p:notesSz cx="6858000" cy="9144000"/>
@@ -125,6 +132,11 @@
       </a:defRPr>
     </a:lvl9pPr>
   </p:defaultTextStyle>
+  <p:extLst>
+    <p:ext uri="{EFAFB233-063F-42B5-8137-9DF3F51BA10A}">
+      <p15:sldGuideLst xmlns:p15="http://schemas.microsoft.com/office/powerpoint/2012/main"/>
+    </p:ext>
+  </p:extLst>
 </p:presentation>
 </file>
 
@@ -210,7 +222,7 @@
           <a:p>
             <a:fld id="{74507132-AF83-45DF-BCDD-5D22C332BC66}" type="datetimeFigureOut">
               <a:rPr lang="ru-RU" smtClean="0"/>
-              <a:t>07.05.2026</a:t>
+              <a:t>11.05.2026</a:t>
             </a:fld>
             <a:endParaRPr lang="ru-RU"/>
           </a:p>
@@ -693,7 +705,7 @@
           <a:p>
             <a:fld id="{E53C03A5-E063-4E90-BC92-E9C79BD4FB42}" type="datetimeFigureOut">
               <a:rPr lang="ru-RU" smtClean="0"/>
-              <a:t>07.05.2026</a:t>
+              <a:t>11.05.2026</a:t>
             </a:fld>
             <a:endParaRPr lang="ru-RU"/>
           </a:p>
@@ -863,7 +875,7 @@
           <a:p>
             <a:fld id="{E53C03A5-E063-4E90-BC92-E9C79BD4FB42}" type="datetimeFigureOut">
               <a:rPr lang="ru-RU" smtClean="0"/>
-              <a:t>07.05.2026</a:t>
+              <a:t>11.05.2026</a:t>
             </a:fld>
             <a:endParaRPr lang="ru-RU"/>
           </a:p>
@@ -1043,7 +1055,7 @@
           <a:p>
             <a:fld id="{E53C03A5-E063-4E90-BC92-E9C79BD4FB42}" type="datetimeFigureOut">
               <a:rPr lang="ru-RU" smtClean="0"/>
-              <a:t>07.05.2026</a:t>
+              <a:t>11.05.2026</a:t>
             </a:fld>
             <a:endParaRPr lang="ru-RU"/>
           </a:p>
@@ -1213,7 +1225,7 @@
           <a:p>
             <a:fld id="{E53C03A5-E063-4E90-BC92-E9C79BD4FB42}" type="datetimeFigureOut">
               <a:rPr lang="ru-RU" smtClean="0"/>
-              <a:t>07.05.2026</a:t>
+              <a:t>11.05.2026</a:t>
             </a:fld>
             <a:endParaRPr lang="ru-RU"/>
           </a:p>
@@ -1459,7 +1471,7 @@
           <a:p>
             <a:fld id="{E53C03A5-E063-4E90-BC92-E9C79BD4FB42}" type="datetimeFigureOut">
               <a:rPr lang="ru-RU" smtClean="0"/>
-              <a:t>07.05.2026</a:t>
+              <a:t>11.05.2026</a:t>
             </a:fld>
             <a:endParaRPr lang="ru-RU"/>
           </a:p>
@@ -1691,7 +1703,7 @@
           <a:p>
             <a:fld id="{E53C03A5-E063-4E90-BC92-E9C79BD4FB42}" type="datetimeFigureOut">
               <a:rPr lang="ru-RU" smtClean="0"/>
-              <a:t>07.05.2026</a:t>
+              <a:t>11.05.2026</a:t>
             </a:fld>
             <a:endParaRPr lang="ru-RU"/>
           </a:p>
@@ -2058,7 +2070,7 @@
           <a:p>
             <a:fld id="{E53C03A5-E063-4E90-BC92-E9C79BD4FB42}" type="datetimeFigureOut">
               <a:rPr lang="ru-RU" smtClean="0"/>
-              <a:t>07.05.2026</a:t>
+              <a:t>11.05.2026</a:t>
             </a:fld>
             <a:endParaRPr lang="ru-RU"/>
           </a:p>
@@ -2176,7 +2188,7 @@
           <a:p>
             <a:fld id="{E53C03A5-E063-4E90-BC92-E9C79BD4FB42}" type="datetimeFigureOut">
               <a:rPr lang="ru-RU" smtClean="0"/>
-              <a:t>07.05.2026</a:t>
+              <a:t>11.05.2026</a:t>
             </a:fld>
             <a:endParaRPr lang="ru-RU"/>
           </a:p>
@@ -2271,7 +2283,7 @@
           <a:p>
             <a:fld id="{E53C03A5-E063-4E90-BC92-E9C79BD4FB42}" type="datetimeFigureOut">
               <a:rPr lang="ru-RU" smtClean="0"/>
-              <a:t>07.05.2026</a:t>
+              <a:t>11.05.2026</a:t>
             </a:fld>
             <a:endParaRPr lang="ru-RU"/>
           </a:p>
@@ -2548,7 +2560,7 @@
           <a:p>
             <a:fld id="{E53C03A5-E063-4E90-BC92-E9C79BD4FB42}" type="datetimeFigureOut">
               <a:rPr lang="ru-RU" smtClean="0"/>
-              <a:t>07.05.2026</a:t>
+              <a:t>11.05.2026</a:t>
             </a:fld>
             <a:endParaRPr lang="ru-RU"/>
           </a:p>
@@ -2801,7 +2813,7 @@
           <a:p>
             <a:fld id="{E53C03A5-E063-4E90-BC92-E9C79BD4FB42}" type="datetimeFigureOut">
               <a:rPr lang="ru-RU" smtClean="0"/>
-              <a:t>07.05.2026</a:t>
+              <a:t>11.05.2026</a:t>
             </a:fld>
             <a:endParaRPr lang="ru-RU"/>
           </a:p>
@@ -3014,7 +3026,7 @@
           <a:p>
             <a:fld id="{E53C03A5-E063-4E90-BC92-E9C79BD4FB42}" type="datetimeFigureOut">
               <a:rPr lang="ru-RU" smtClean="0"/>
-              <a:t>07.05.2026</a:t>
+              <a:t>11.05.2026</a:t>
             </a:fld>
             <a:endParaRPr lang="ru-RU"/>
           </a:p>
@@ -3510,15 +3522,7 @@
             </a:pPr>
             <a:r>
               <a:rPr lang="ru-RU" sz="2000" kern="1100" dirty="0" smtClean="0"/>
-              <a:t>Выполнил: Нагорный </a:t>
-            </a:r>
-            <a:r>
-              <a:rPr lang="ru-RU" sz="2000" kern="1100" dirty="0" smtClean="0"/>
-              <a:t>Д</a:t>
-            </a:r>
-            <a:r>
-              <a:rPr lang="ru-RU" sz="2000" kern="1100" dirty="0" smtClean="0"/>
-              <a:t>.Г., </a:t>
+              <a:t>Выполнил: Нагорный Д.Г., </a:t>
             </a:r>
             <a:endParaRPr lang="ru-RU" sz="2000" kern="1100" dirty="0"/>
           </a:p>
@@ -3582,15 +3586,7 @@
             </a:r>
             <a:r>
               <a:rPr lang="ru-RU" sz="2000" kern="1100" dirty="0" smtClean="0"/>
-              <a:t>Гончарова </a:t>
-            </a:r>
-            <a:r>
-              <a:rPr lang="ru-RU" sz="2000" kern="1100" dirty="0" smtClean="0"/>
-              <a:t>Т</a:t>
-            </a:r>
-            <a:r>
-              <a:rPr lang="ru-RU" sz="2000" kern="1100" dirty="0" smtClean="0"/>
-              <a:t>.В., </a:t>
+              <a:t>Гончарова Т.В., </a:t>
             </a:r>
             <a:r>
               <a:rPr lang="ru-RU" sz="2000" kern="1100" dirty="0"/>
@@ -3875,10 +3871,6 @@
               </a:rPr>
               <a:t>автоматизировать процессы бронирования столиков, управления интерактивной картой зала и реализации программы лояльности ресторана «67 Небо».</a:t>
             </a:r>
-            <a:endParaRPr lang="ru-RU" sz="2400" dirty="0">
-              <a:latin typeface="Times New Roman" panose="02020603050405020304" pitchFamily="18" charset="0"/>
-              <a:cs typeface="Times New Roman" panose="02020603050405020304" pitchFamily="18" charset="0"/>
-            </a:endParaRPr>
           </a:p>
         </p:txBody>
       </p:sp>
@@ -4477,8 +4469,12 @@
           <a:p>
             <a:pPr algn="ctr"/>
             <a:r>
+              <a:rPr lang="ru-RU" sz="3200" b="1" dirty="0" smtClean="0"/>
+              <a:t>КОНЦЕПТУАЛЬНАЯ </a:t>
+            </a:r>
+            <a:r>
               <a:rPr lang="ru-RU" sz="3200" b="1" dirty="0"/>
-              <a:t>ЛОГИЧЕСКАЯ МОДЕЛЬ ДАННЫХ</a:t>
+              <a:t>МОДЕЛЬ ДАННЫХ</a:t>
             </a:r>
           </a:p>
         </p:txBody>
@@ -4497,8 +4493,8 @@
         </p:blipFill>
         <p:spPr>
           <a:xfrm>
-            <a:off x="3077351" y="887760"/>
-            <a:ext cx="6119841" cy="5599980"/>
+            <a:off x="1653017" y="887760"/>
+            <a:ext cx="8968509" cy="5743949"/>
           </a:xfrm>
           <a:prstGeom prst="rect">
             <a:avLst/>
@@ -4508,7 +4504,7 @@
     </p:spTree>
     <p:extLst>
       <p:ext uri="{BB962C8B-B14F-4D97-AF65-F5344CB8AC3E}">
-        <p14:creationId xmlns:p14="http://schemas.microsoft.com/office/powerpoint/2010/main" val="1600971018"/>
+        <p14:creationId xmlns:p14="http://schemas.microsoft.com/office/powerpoint/2010/main" val="569436146"/>
       </p:ext>
     </p:extLst>
   </p:cSld>
@@ -4560,71 +4556,15 @@
             <a:pPr algn="ctr"/>
             <a:r>
               <a:rPr lang="ru-RU" sz="3200" b="1" dirty="0"/>
-              <a:t>АНАЛИТИЧЕСКИЕ ЗАПРОСЫ К БАЗЕ ДАННЫХ</a:t>
-            </a:r>
-          </a:p>
-        </p:txBody>
-      </p:sp>
-      <p:sp>
-        <p:nvSpPr>
-          <p:cNvPr id="3" name="TextBox 2"/>
-          <p:cNvSpPr txBox="1"/>
-          <p:nvPr/>
-        </p:nvSpPr>
-        <p:spPr>
-          <a:xfrm>
-            <a:off x="665386" y="1439504"/>
-            <a:ext cx="10943771" cy="461665"/>
-          </a:xfrm>
-          <a:prstGeom prst="rect">
-            <a:avLst/>
-          </a:prstGeom>
-          <a:noFill/>
-        </p:spPr>
-        <p:txBody>
-          <a:bodyPr wrap="square" rtlCol="0">
-            <a:spAutoFit/>
-          </a:bodyPr>
-          <a:lstStyle/>
-          <a:p>
-            <a:pPr lvl="0" algn="just">
-              <a:lnSpc>
-                <a:spcPct val="150000"/>
-              </a:lnSpc>
-            </a:pPr>
-            <a:r>
-              <a:rPr lang="ru-RU" dirty="0" smtClean="0">
-                <a:solidFill>
-                  <a:srgbClr val="000000"/>
-                </a:solidFill>
-                <a:latin typeface="Times New Roman" panose="02020603050405020304" pitchFamily="18" charset="0"/>
-                <a:ea typeface="Times New Roman" panose="02020603050405020304" pitchFamily="18" charset="0"/>
-              </a:rPr>
-              <a:t>Проверка режима работы филиалов</a:t>
-            </a:r>
-            <a:endParaRPr lang="ru-RU" sz="1800" dirty="0">
-              <a:solidFill>
-                <a:srgbClr val="000000"/>
-              </a:solidFill>
-              <a:effectLst/>
-              <a:latin typeface="Times New Roman" panose="02020603050405020304" pitchFamily="18" charset="0"/>
-              <a:ea typeface="Times New Roman" panose="02020603050405020304" pitchFamily="18" charset="0"/>
-            </a:endParaRPr>
+              <a:t>ЛОГИЧЕСКАЯ МОДЕЛЬ ДАННЫХ</a:t>
+            </a:r>
           </a:p>
         </p:txBody>
       </p:sp>
       <p:pic>
         <p:nvPicPr>
-          <p:cNvPr id="4" name="Рисунок 3">
-            <a:extLst>
-              <a:ext uri="{FF2B5EF4-FFF2-40B4-BE49-F238E27FC236}">
-                <a16:creationId xmlns:a16="http://schemas.microsoft.com/office/drawing/2014/main" id="{24FF46E6-6C82-CBE9-CBBE-6573F3AA07B8}"/>
-              </a:ext>
-            </a:extLst>
-          </p:cNvPr>
-          <p:cNvPicPr>
-            <a:picLocks noChangeAspect="1"/>
-          </p:cNvPicPr>
+          <p:cNvPr id="4" name="Рисунок 3"/>
+          <p:cNvPicPr/>
           <p:nvPr/>
         </p:nvPicPr>
         <p:blipFill>
@@ -4635,8 +4575,8 @@
         </p:blipFill>
         <p:spPr>
           <a:xfrm>
-            <a:off x="3676650" y="2106029"/>
-            <a:ext cx="4838700" cy="4127500"/>
+            <a:off x="3077351" y="887760"/>
+            <a:ext cx="6119841" cy="5599980"/>
           </a:xfrm>
           <a:prstGeom prst="rect">
             <a:avLst/>
@@ -4646,7 +4586,7 @@
     </p:spTree>
     <p:extLst>
       <p:ext uri="{BB962C8B-B14F-4D97-AF65-F5344CB8AC3E}">
-        <p14:creationId xmlns:p14="http://schemas.microsoft.com/office/powerpoint/2010/main" val="2526091785"/>
+        <p14:creationId xmlns:p14="http://schemas.microsoft.com/office/powerpoint/2010/main" val="1600971018"/>
       </p:ext>
     </p:extLst>
   </p:cSld>
@@ -4675,7 +4615,7 @@
       </p:grpSpPr>
       <p:sp>
         <p:nvSpPr>
-          <p:cNvPr id="2" name="TextBox 1"/>
+          <p:cNvPr id="5" name="TextBox 4"/>
           <p:cNvSpPr txBox="1"/>
           <p:nvPr/>
         </p:nvSpPr>
@@ -4697,15 +4637,19 @@
           <a:p>
             <a:pPr algn="ctr"/>
             <a:r>
+              <a:rPr lang="ru-RU" sz="3200" b="1" dirty="0" smtClean="0"/>
+              <a:t>ФИЗИЧЕСКАЯ </a:t>
+            </a:r>
+            <a:r>
               <a:rPr lang="ru-RU" sz="3200" b="1" dirty="0"/>
-              <a:t>ПОЛЬЗОВАТЕЛЬСКИЙ ИНТЕРФЕЙС</a:t>
+              <a:t>МОДЕЛЬ ДАННЫХ</a:t>
             </a:r>
           </a:p>
         </p:txBody>
       </p:sp>
       <p:pic>
         <p:nvPicPr>
-          <p:cNvPr id="6" name="Рисунок 5"/>
+          <p:cNvPr id="7" name="Рисунок 6"/>
           <p:cNvPicPr/>
           <p:nvPr/>
         </p:nvPicPr>
@@ -4717,74 +4661,8 @@
         </p:blipFill>
         <p:spPr>
           <a:xfrm>
-            <a:off x="375101" y="985115"/>
-            <a:ext cx="2617481" cy="4916921"/>
-          </a:xfrm>
-          <a:prstGeom prst="rect">
-            <a:avLst/>
-          </a:prstGeom>
-        </p:spPr>
-      </p:pic>
-      <p:pic>
-        <p:nvPicPr>
-          <p:cNvPr id="7" name="Рисунок 6"/>
-          <p:cNvPicPr/>
-          <p:nvPr/>
-        </p:nvPicPr>
-        <p:blipFill>
-          <a:blip r:embed="rId3"/>
-          <a:stretch>
-            <a:fillRect/>
-          </a:stretch>
-        </p:blipFill>
-        <p:spPr>
-          <a:xfrm>
-            <a:off x="3172399" y="985113"/>
-            <a:ext cx="2778069" cy="4916922"/>
-          </a:xfrm>
-          <a:prstGeom prst="rect">
-            <a:avLst/>
-          </a:prstGeom>
-        </p:spPr>
-      </p:pic>
-      <p:pic>
-        <p:nvPicPr>
-          <p:cNvPr id="8" name="Рисунок 7"/>
-          <p:cNvPicPr/>
-          <p:nvPr/>
-        </p:nvPicPr>
-        <p:blipFill>
-          <a:blip r:embed="rId4"/>
-          <a:stretch>
-            <a:fillRect/>
-          </a:stretch>
-        </p:blipFill>
-        <p:spPr>
-          <a:xfrm>
-            <a:off x="6130285" y="985113"/>
-            <a:ext cx="2701928" cy="4916922"/>
-          </a:xfrm>
-          <a:prstGeom prst="rect">
-            <a:avLst/>
-          </a:prstGeom>
-        </p:spPr>
-      </p:pic>
-      <p:pic>
-        <p:nvPicPr>
-          <p:cNvPr id="10" name="Рисунок 9"/>
-          <p:cNvPicPr/>
-          <p:nvPr/>
-        </p:nvPicPr>
-        <p:blipFill>
-          <a:blip r:embed="rId5"/>
-          <a:stretch>
-            <a:fillRect/>
-          </a:stretch>
-        </p:blipFill>
-        <p:spPr>
-          <a:xfrm>
-            <a:off x="9012029" y="985113"/>
-            <a:ext cx="2607315" cy="4916922"/>
+            <a:off x="2847508" y="1131887"/>
+            <a:ext cx="6579527" cy="4797858"/>
           </a:xfrm>
           <a:prstGeom prst="rect">
             <a:avLst/>
@@ -4794,7 +4672,7 @@
     </p:spTree>
     <p:extLst>
       <p:ext uri="{BB962C8B-B14F-4D97-AF65-F5344CB8AC3E}">
-        <p14:creationId xmlns:p14="http://schemas.microsoft.com/office/powerpoint/2010/main" val="4093182167"/>
+        <p14:creationId xmlns:p14="http://schemas.microsoft.com/office/powerpoint/2010/main" val="1856809941"/>
       </p:ext>
     </p:extLst>
   </p:cSld>
@@ -4829,8 +4707,8 @@
         </p:nvSpPr>
         <p:spPr>
           <a:xfrm>
-            <a:off x="2286000" y="609600"/>
-            <a:ext cx="7867650" cy="584775"/>
+            <a:off x="375101" y="302985"/>
+            <a:ext cx="11524343" cy="584775"/>
           </a:xfrm>
           <a:prstGeom prst="rect">
             <a:avLst/>
@@ -4846,55 +4724,85 @@
             <a:pPr algn="ctr"/>
             <a:r>
               <a:rPr lang="ru-RU" sz="3200" b="1" dirty="0"/>
-              <a:t>ЗАКЛЮЧЕНИЕ</a:t>
-            </a:r>
-          </a:p>
-        </p:txBody>
-      </p:sp>
-      <p:sp>
-        <p:nvSpPr>
-          <p:cNvPr id="4" name="Прямоугольник 3"/>
-          <p:cNvSpPr/>
+              <a:t>АНАЛИТИЧЕСКИЕ ЗАПРОСЫ К БАЗЕ ДАННЫХ</a:t>
+            </a:r>
+          </a:p>
+        </p:txBody>
+      </p:sp>
+      <p:sp>
+        <p:nvSpPr>
+          <p:cNvPr id="3" name="TextBox 2"/>
+          <p:cNvSpPr txBox="1"/>
           <p:nvPr/>
         </p:nvSpPr>
         <p:spPr>
           <a:xfrm>
-            <a:off x="1307939" y="2274838"/>
-            <a:ext cx="10052148" cy="3046988"/>
+            <a:off x="624114" y="1522631"/>
+            <a:ext cx="10943771" cy="461665"/>
           </a:xfrm>
           <a:prstGeom prst="rect">
             <a:avLst/>
           </a:prstGeom>
-        </p:spPr>
-        <p:txBody>
-          <a:bodyPr wrap="square">
+          <a:noFill/>
+        </p:spPr>
+        <p:txBody>
+          <a:bodyPr wrap="square" rtlCol="0">
             <a:spAutoFit/>
           </a:bodyPr>
           <a:lstStyle/>
           <a:p>
-            <a:r>
-              <a:rPr lang="ru-RU" sz="2400" dirty="0" smtClean="0"/>
-              <a:t>В заключение курсовой работы по теме «Проектирование ИС ресторана "67 Небо"» можно отметить, что была разработана система, предоставляющая клиентам возможность удобного бронирования столиков через интерактивную карту и участия в автоматизированной программе лояльности. Разработка этой информационной системы представляет собой важный шаг в </a:t>
-            </a:r>
-            <a:r>
-              <a:rPr lang="ru-RU" sz="2400" dirty="0" err="1" smtClean="0"/>
-              <a:t>цифровизации</a:t>
-            </a:r>
-            <a:r>
-              <a:rPr lang="ru-RU" sz="2400" dirty="0" smtClean="0"/>
-              <a:t> ресторанного бизнеса, обеспечивая гостям современный сервис, а заведению - эффективный инструмент управления бронированием и клиентской базой.</a:t>
-            </a:r>
-            <a:endParaRPr lang="ru-RU" sz="2400" i="1" dirty="0">
+            <a:pPr lvl="0" algn="just">
+              <a:lnSpc>
+                <a:spcPct val="150000"/>
+              </a:lnSpc>
+            </a:pPr>
+            <a:r>
+              <a:rPr lang="ru-RU" dirty="0" smtClean="0">
+                <a:solidFill>
+                  <a:srgbClr val="000000"/>
+                </a:solidFill>
+                <a:latin typeface="Times New Roman" panose="02020603050405020304" pitchFamily="18" charset="0"/>
+                <a:ea typeface="Times New Roman" panose="02020603050405020304" pitchFamily="18" charset="0"/>
+              </a:rPr>
+              <a:t>Проверка режима работы филиалов</a:t>
+            </a:r>
+            <a:endParaRPr lang="ru-RU" sz="1800" dirty="0">
+              <a:solidFill>
+                <a:srgbClr val="000000"/>
+              </a:solidFill>
               <a:effectLst/>
+              <a:latin typeface="Times New Roman" panose="02020603050405020304" pitchFamily="18" charset="0"/>
               <a:ea typeface="Times New Roman" panose="02020603050405020304" pitchFamily="18" charset="0"/>
             </a:endParaRPr>
           </a:p>
         </p:txBody>
       </p:sp>
+      <p:pic>
+        <p:nvPicPr>
+          <p:cNvPr id="5" name="Рисунок 4"/>
+          <p:cNvPicPr/>
+          <p:nvPr/>
+        </p:nvPicPr>
+        <p:blipFill>
+          <a:blip r:embed="rId2"/>
+          <a:stretch>
+            <a:fillRect/>
+          </a:stretch>
+        </p:blipFill>
+        <p:spPr>
+          <a:xfrm>
+            <a:off x="3499424" y="1984296"/>
+            <a:ext cx="5191994" cy="3991631"/>
+          </a:xfrm>
+          <a:prstGeom prst="rect">
+            <a:avLst/>
+          </a:prstGeom>
+        </p:spPr>
+      </p:pic>
     </p:spTree>
     <p:extLst>
       <p:ext uri="{BB962C8B-B14F-4D97-AF65-F5344CB8AC3E}">
-        <p14:creationId xmlns:p14="http://schemas.microsoft.com/office/powerpoint/2010/main" val="2110265161"/>
+        <p14:creationId xmlns:p14="http://schemas.microsoft.com/office/powerpoint/2010/main" val="2526091785"/>
       </p:ext>
     </p:extLst>
   </p:cSld>
@@ -4929,8 +4837,8 @@
         </p:nvSpPr>
         <p:spPr>
           <a:xfrm>
-            <a:off x="2271487" y="2975428"/>
-            <a:ext cx="7867650" cy="707886"/>
+            <a:off x="665386" y="1439504"/>
+            <a:ext cx="10943771" cy="369332"/>
           </a:xfrm>
           <a:prstGeom prst="rect">
             <a:avLst/>
@@ -4945,16 +4853,39 @@
           <a:p>
             <a:pPr algn="ctr"/>
             <a:r>
-              <a:rPr lang="ru-RU" sz="4000" b="1" dirty="0"/>
-              <a:t>СПАСИБО ЗА ВНИМАНИЕ!</a:t>
-            </a:r>
-          </a:p>
-        </p:txBody>
-      </p:sp>
+              <a:rPr lang="ru-RU" dirty="0"/>
+              <a:t>Анализ максимальной выручки по заказам</a:t>
+            </a:r>
+            <a:endParaRPr lang="ru-RU" sz="2400" dirty="0"/>
+          </a:p>
+        </p:txBody>
+      </p:sp>
+      <p:pic>
+        <p:nvPicPr>
+          <p:cNvPr id="6" name="Рисунок 5"/>
+          <p:cNvPicPr/>
+          <p:nvPr/>
+        </p:nvPicPr>
+        <p:blipFill>
+          <a:blip r:embed="rId2"/>
+          <a:stretch>
+            <a:fillRect/>
+          </a:stretch>
+        </p:blipFill>
+        <p:spPr>
+          <a:xfrm>
+            <a:off x="3490690" y="1964777"/>
+            <a:ext cx="5293162" cy="3355368"/>
+          </a:xfrm>
+          <a:prstGeom prst="rect">
+            <a:avLst/>
+          </a:prstGeom>
+        </p:spPr>
+      </p:pic>
     </p:spTree>
     <p:extLst>
       <p:ext uri="{BB962C8B-B14F-4D97-AF65-F5344CB8AC3E}">
-        <p14:creationId xmlns:p14="http://schemas.microsoft.com/office/powerpoint/2010/main" val="3276542283"/>
+        <p14:creationId xmlns:p14="http://schemas.microsoft.com/office/powerpoint/2010/main" val="2865883408"/>
       </p:ext>
     </p:extLst>
   </p:cSld>
@@ -5065,6 +4996,646 @@
     <p:extLst>
       <p:ext uri="{BB962C8B-B14F-4D97-AF65-F5344CB8AC3E}">
         <p14:creationId xmlns:p14="http://schemas.microsoft.com/office/powerpoint/2010/main" val="250907804"/>
+      </p:ext>
+    </p:extLst>
+  </p:cSld>
+  <p:clrMapOvr>
+    <a:masterClrMapping/>
+  </p:clrMapOvr>
+</p:sld>
+</file>
+
+<file path=ppt/slides/slide20.xml><?xml version="1.0" encoding="utf-8"?>
+<p:sld xmlns:a="http://schemas.openxmlformats.org/drawingml/2006/main" xmlns:r="http://schemas.openxmlformats.org/officeDocument/2006/relationships" xmlns:p="http://schemas.openxmlformats.org/presentationml/2006/main">
+  <p:cSld>
+    <p:spTree>
+      <p:nvGrpSpPr>
+        <p:cNvPr id="1" name=""/>
+        <p:cNvGrpSpPr/>
+        <p:nvPr/>
+      </p:nvGrpSpPr>
+      <p:grpSpPr>
+        <a:xfrm>
+          <a:off x="0" y="0"/>
+          <a:ext cx="0" cy="0"/>
+          <a:chOff x="0" y="0"/>
+          <a:chExt cx="0" cy="0"/>
+        </a:xfrm>
+      </p:grpSpPr>
+      <p:sp>
+        <p:nvSpPr>
+          <p:cNvPr id="3" name="TextBox 2"/>
+          <p:cNvSpPr txBox="1"/>
+          <p:nvPr/>
+        </p:nvSpPr>
+        <p:spPr>
+          <a:xfrm>
+            <a:off x="665386" y="1439504"/>
+            <a:ext cx="10943771" cy="369332"/>
+          </a:xfrm>
+          <a:prstGeom prst="rect">
+            <a:avLst/>
+          </a:prstGeom>
+          <a:noFill/>
+        </p:spPr>
+        <p:txBody>
+          <a:bodyPr wrap="square" rtlCol="0">
+            <a:spAutoFit/>
+          </a:bodyPr>
+          <a:lstStyle/>
+          <a:p>
+            <a:pPr algn="ctr"/>
+            <a:r>
+              <a:rPr lang="ru-RU" dirty="0"/>
+              <a:t>Идентификация наиболее лояльных клиентов</a:t>
+            </a:r>
+            <a:endParaRPr lang="ru-RU" sz="2400" dirty="0"/>
+          </a:p>
+        </p:txBody>
+      </p:sp>
+      <p:pic>
+        <p:nvPicPr>
+          <p:cNvPr id="4" name="Рисунок 3"/>
+          <p:cNvPicPr/>
+          <p:nvPr/>
+        </p:nvPicPr>
+        <p:blipFill>
+          <a:blip r:embed="rId2"/>
+          <a:stretch>
+            <a:fillRect/>
+          </a:stretch>
+        </p:blipFill>
+        <p:spPr>
+          <a:xfrm>
+            <a:off x="3088953" y="2034453"/>
+            <a:ext cx="6096635" cy="2733675"/>
+          </a:xfrm>
+          <a:prstGeom prst="rect">
+            <a:avLst/>
+          </a:prstGeom>
+        </p:spPr>
+      </p:pic>
+    </p:spTree>
+    <p:extLst>
+      <p:ext uri="{BB962C8B-B14F-4D97-AF65-F5344CB8AC3E}">
+        <p14:creationId xmlns:p14="http://schemas.microsoft.com/office/powerpoint/2010/main" val="3060561473"/>
+      </p:ext>
+    </p:extLst>
+  </p:cSld>
+  <p:clrMapOvr>
+    <a:masterClrMapping/>
+  </p:clrMapOvr>
+</p:sld>
+</file>
+
+<file path=ppt/slides/slide21.xml><?xml version="1.0" encoding="utf-8"?>
+<p:sld xmlns:a="http://schemas.openxmlformats.org/drawingml/2006/main" xmlns:r="http://schemas.openxmlformats.org/officeDocument/2006/relationships" xmlns:p="http://schemas.openxmlformats.org/presentationml/2006/main">
+  <p:cSld>
+    <p:spTree>
+      <p:nvGrpSpPr>
+        <p:cNvPr id="1" name=""/>
+        <p:cNvGrpSpPr/>
+        <p:nvPr/>
+      </p:nvGrpSpPr>
+      <p:grpSpPr>
+        <a:xfrm>
+          <a:off x="0" y="0"/>
+          <a:ext cx="0" cy="0"/>
+          <a:chOff x="0" y="0"/>
+          <a:chExt cx="0" cy="0"/>
+        </a:xfrm>
+      </p:grpSpPr>
+      <p:sp>
+        <p:nvSpPr>
+          <p:cNvPr id="3" name="TextBox 2"/>
+          <p:cNvSpPr txBox="1"/>
+          <p:nvPr/>
+        </p:nvSpPr>
+        <p:spPr>
+          <a:xfrm>
+            <a:off x="665386" y="1439504"/>
+            <a:ext cx="10943771" cy="369332"/>
+          </a:xfrm>
+          <a:prstGeom prst="rect">
+            <a:avLst/>
+          </a:prstGeom>
+          <a:noFill/>
+        </p:spPr>
+        <p:txBody>
+          <a:bodyPr wrap="square" rtlCol="0">
+            <a:spAutoFit/>
+          </a:bodyPr>
+          <a:lstStyle/>
+          <a:p>
+            <a:pPr algn="ctr"/>
+            <a:r>
+              <a:rPr lang="ru-RU" dirty="0"/>
+              <a:t>Формирование списка активных бронирований</a:t>
+            </a:r>
+            <a:endParaRPr lang="ru-RU" sz="2400" dirty="0"/>
+          </a:p>
+        </p:txBody>
+      </p:sp>
+      <p:pic>
+        <p:nvPicPr>
+          <p:cNvPr id="4" name="Рисунок 3"/>
+          <p:cNvPicPr/>
+          <p:nvPr/>
+        </p:nvPicPr>
+        <p:blipFill>
+          <a:blip r:embed="rId2"/>
+          <a:stretch>
+            <a:fillRect/>
+          </a:stretch>
+        </p:blipFill>
+        <p:spPr>
+          <a:xfrm>
+            <a:off x="3001020" y="2056591"/>
+            <a:ext cx="6272502" cy="4104063"/>
+          </a:xfrm>
+          <a:prstGeom prst="rect">
+            <a:avLst/>
+          </a:prstGeom>
+        </p:spPr>
+      </p:pic>
+    </p:spTree>
+    <p:extLst>
+      <p:ext uri="{BB962C8B-B14F-4D97-AF65-F5344CB8AC3E}">
+        <p14:creationId xmlns:p14="http://schemas.microsoft.com/office/powerpoint/2010/main" val="3168898772"/>
+      </p:ext>
+    </p:extLst>
+  </p:cSld>
+  <p:clrMapOvr>
+    <a:masterClrMapping/>
+  </p:clrMapOvr>
+</p:sld>
+</file>
+
+<file path=ppt/slides/slide22.xml><?xml version="1.0" encoding="utf-8"?>
+<p:sld xmlns:a="http://schemas.openxmlformats.org/drawingml/2006/main" xmlns:r="http://schemas.openxmlformats.org/officeDocument/2006/relationships" xmlns:p="http://schemas.openxmlformats.org/presentationml/2006/main">
+  <p:cSld>
+    <p:spTree>
+      <p:nvGrpSpPr>
+        <p:cNvPr id="1" name=""/>
+        <p:cNvGrpSpPr/>
+        <p:nvPr/>
+      </p:nvGrpSpPr>
+      <p:grpSpPr>
+        <a:xfrm>
+          <a:off x="0" y="0"/>
+          <a:ext cx="0" cy="0"/>
+          <a:chOff x="0" y="0"/>
+          <a:chExt cx="0" cy="0"/>
+        </a:xfrm>
+      </p:grpSpPr>
+      <p:sp>
+        <p:nvSpPr>
+          <p:cNvPr id="3" name="TextBox 2"/>
+          <p:cNvSpPr txBox="1"/>
+          <p:nvPr/>
+        </p:nvSpPr>
+        <p:spPr>
+          <a:xfrm>
+            <a:off x="665386" y="1439504"/>
+            <a:ext cx="10943771" cy="369332"/>
+          </a:xfrm>
+          <a:prstGeom prst="rect">
+            <a:avLst/>
+          </a:prstGeom>
+          <a:noFill/>
+        </p:spPr>
+        <p:txBody>
+          <a:bodyPr wrap="square" rtlCol="0">
+            <a:spAutoFit/>
+          </a:bodyPr>
+          <a:lstStyle/>
+          <a:p>
+            <a:pPr algn="ctr"/>
+            <a:r>
+              <a:rPr lang="ru-RU" dirty="0"/>
+              <a:t>Проверка состава конкретного чека</a:t>
+            </a:r>
+            <a:endParaRPr lang="ru-RU" sz="2400" dirty="0"/>
+          </a:p>
+        </p:txBody>
+      </p:sp>
+      <p:pic>
+        <p:nvPicPr>
+          <p:cNvPr id="4" name="Рисунок 3"/>
+          <p:cNvPicPr/>
+          <p:nvPr/>
+        </p:nvPicPr>
+        <p:blipFill>
+          <a:blip r:embed="rId2"/>
+          <a:stretch>
+            <a:fillRect/>
+          </a:stretch>
+        </p:blipFill>
+        <p:spPr>
+          <a:xfrm>
+            <a:off x="3339155" y="1935306"/>
+            <a:ext cx="5596231" cy="2941493"/>
+          </a:xfrm>
+          <a:prstGeom prst="rect">
+            <a:avLst/>
+          </a:prstGeom>
+        </p:spPr>
+      </p:pic>
+    </p:spTree>
+    <p:extLst>
+      <p:ext uri="{BB962C8B-B14F-4D97-AF65-F5344CB8AC3E}">
+        <p14:creationId xmlns:p14="http://schemas.microsoft.com/office/powerpoint/2010/main" val="3892677942"/>
+      </p:ext>
+    </p:extLst>
+  </p:cSld>
+  <p:clrMapOvr>
+    <a:masterClrMapping/>
+  </p:clrMapOvr>
+</p:sld>
+</file>
+
+<file path=ppt/slides/slide23.xml><?xml version="1.0" encoding="utf-8"?>
+<p:sld xmlns:a="http://schemas.openxmlformats.org/drawingml/2006/main" xmlns:r="http://schemas.openxmlformats.org/officeDocument/2006/relationships" xmlns:p="http://schemas.openxmlformats.org/presentationml/2006/main">
+  <p:cSld>
+    <p:spTree>
+      <p:nvGrpSpPr>
+        <p:cNvPr id="1" name=""/>
+        <p:cNvGrpSpPr/>
+        <p:nvPr/>
+      </p:nvGrpSpPr>
+      <p:grpSpPr>
+        <a:xfrm>
+          <a:off x="0" y="0"/>
+          <a:ext cx="0" cy="0"/>
+          <a:chOff x="0" y="0"/>
+          <a:chExt cx="0" cy="0"/>
+        </a:xfrm>
+      </p:grpSpPr>
+      <p:sp>
+        <p:nvSpPr>
+          <p:cNvPr id="3" name="TextBox 2"/>
+          <p:cNvSpPr txBox="1"/>
+          <p:nvPr/>
+        </p:nvSpPr>
+        <p:spPr>
+          <a:xfrm>
+            <a:off x="665386" y="1439504"/>
+            <a:ext cx="10943771" cy="369332"/>
+          </a:xfrm>
+          <a:prstGeom prst="rect">
+            <a:avLst/>
+          </a:prstGeom>
+          <a:noFill/>
+        </p:spPr>
+        <p:txBody>
+          <a:bodyPr wrap="square" rtlCol="0">
+            <a:spAutoFit/>
+          </a:bodyPr>
+          <a:lstStyle/>
+          <a:p>
+            <a:pPr algn="ctr"/>
+            <a:r>
+              <a:rPr lang="ru-RU" dirty="0"/>
+              <a:t>Подбор столика по количеству персон</a:t>
+            </a:r>
+            <a:endParaRPr lang="ru-RU" sz="2400" dirty="0"/>
+          </a:p>
+        </p:txBody>
+      </p:sp>
+      <p:pic>
+        <p:nvPicPr>
+          <p:cNvPr id="4" name="Рисунок 3"/>
+          <p:cNvPicPr/>
+          <p:nvPr/>
+        </p:nvPicPr>
+        <p:blipFill>
+          <a:blip r:embed="rId2"/>
+          <a:stretch>
+            <a:fillRect/>
+          </a:stretch>
+        </p:blipFill>
+        <p:spPr>
+          <a:xfrm>
+            <a:off x="3323425" y="2017569"/>
+            <a:ext cx="5627692" cy="3348758"/>
+          </a:xfrm>
+          <a:prstGeom prst="rect">
+            <a:avLst/>
+          </a:prstGeom>
+        </p:spPr>
+      </p:pic>
+    </p:spTree>
+    <p:extLst>
+      <p:ext uri="{BB962C8B-B14F-4D97-AF65-F5344CB8AC3E}">
+        <p14:creationId xmlns:p14="http://schemas.microsoft.com/office/powerpoint/2010/main" val="1657994624"/>
+      </p:ext>
+    </p:extLst>
+  </p:cSld>
+  <p:clrMapOvr>
+    <a:masterClrMapping/>
+  </p:clrMapOvr>
+</p:sld>
+</file>
+
+<file path=ppt/slides/slide24.xml><?xml version="1.0" encoding="utf-8"?>
+<p:sld xmlns:a="http://schemas.openxmlformats.org/drawingml/2006/main" xmlns:r="http://schemas.openxmlformats.org/officeDocument/2006/relationships" xmlns:p="http://schemas.openxmlformats.org/presentationml/2006/main">
+  <p:cSld>
+    <p:spTree>
+      <p:nvGrpSpPr>
+        <p:cNvPr id="1" name=""/>
+        <p:cNvGrpSpPr/>
+        <p:nvPr/>
+      </p:nvGrpSpPr>
+      <p:grpSpPr>
+        <a:xfrm>
+          <a:off x="0" y="0"/>
+          <a:ext cx="0" cy="0"/>
+          <a:chOff x="0" y="0"/>
+          <a:chExt cx="0" cy="0"/>
+        </a:xfrm>
+      </p:grpSpPr>
+      <p:sp>
+        <p:nvSpPr>
+          <p:cNvPr id="2" name="TextBox 1"/>
+          <p:cNvSpPr txBox="1"/>
+          <p:nvPr/>
+        </p:nvSpPr>
+        <p:spPr>
+          <a:xfrm>
+            <a:off x="375101" y="302985"/>
+            <a:ext cx="11524343" cy="584775"/>
+          </a:xfrm>
+          <a:prstGeom prst="rect">
+            <a:avLst/>
+          </a:prstGeom>
+          <a:noFill/>
+        </p:spPr>
+        <p:txBody>
+          <a:bodyPr wrap="square" rtlCol="0">
+            <a:spAutoFit/>
+          </a:bodyPr>
+          <a:lstStyle/>
+          <a:p>
+            <a:pPr algn="ctr"/>
+            <a:r>
+              <a:rPr lang="ru-RU" sz="3200" b="1" dirty="0"/>
+              <a:t>ПОЛЬЗОВАТЕЛЬСКИЙ ИНТЕРФЕЙС</a:t>
+            </a:r>
+          </a:p>
+        </p:txBody>
+      </p:sp>
+      <p:pic>
+        <p:nvPicPr>
+          <p:cNvPr id="6" name="Рисунок 5"/>
+          <p:cNvPicPr/>
+          <p:nvPr/>
+        </p:nvPicPr>
+        <p:blipFill>
+          <a:blip r:embed="rId2"/>
+          <a:stretch>
+            <a:fillRect/>
+          </a:stretch>
+        </p:blipFill>
+        <p:spPr>
+          <a:xfrm>
+            <a:off x="375101" y="985115"/>
+            <a:ext cx="2617481" cy="4916921"/>
+          </a:xfrm>
+          <a:prstGeom prst="rect">
+            <a:avLst/>
+          </a:prstGeom>
+        </p:spPr>
+      </p:pic>
+      <p:pic>
+        <p:nvPicPr>
+          <p:cNvPr id="7" name="Рисунок 6"/>
+          <p:cNvPicPr/>
+          <p:nvPr/>
+        </p:nvPicPr>
+        <p:blipFill>
+          <a:blip r:embed="rId3"/>
+          <a:stretch>
+            <a:fillRect/>
+          </a:stretch>
+        </p:blipFill>
+        <p:spPr>
+          <a:xfrm>
+            <a:off x="3172399" y="985113"/>
+            <a:ext cx="2778069" cy="4916922"/>
+          </a:xfrm>
+          <a:prstGeom prst="rect">
+            <a:avLst/>
+          </a:prstGeom>
+        </p:spPr>
+      </p:pic>
+      <p:pic>
+        <p:nvPicPr>
+          <p:cNvPr id="8" name="Рисунок 7"/>
+          <p:cNvPicPr/>
+          <p:nvPr/>
+        </p:nvPicPr>
+        <p:blipFill>
+          <a:blip r:embed="rId4"/>
+          <a:stretch>
+            <a:fillRect/>
+          </a:stretch>
+        </p:blipFill>
+        <p:spPr>
+          <a:xfrm>
+            <a:off x="6130285" y="985113"/>
+            <a:ext cx="2701928" cy="4916922"/>
+          </a:xfrm>
+          <a:prstGeom prst="rect">
+            <a:avLst/>
+          </a:prstGeom>
+        </p:spPr>
+      </p:pic>
+      <p:pic>
+        <p:nvPicPr>
+          <p:cNvPr id="10" name="Рисунок 9"/>
+          <p:cNvPicPr/>
+          <p:nvPr/>
+        </p:nvPicPr>
+        <p:blipFill>
+          <a:blip r:embed="rId5"/>
+          <a:stretch>
+            <a:fillRect/>
+          </a:stretch>
+        </p:blipFill>
+        <p:spPr>
+          <a:xfrm>
+            <a:off x="9012029" y="985113"/>
+            <a:ext cx="2607315" cy="4916922"/>
+          </a:xfrm>
+          <a:prstGeom prst="rect">
+            <a:avLst/>
+          </a:prstGeom>
+        </p:spPr>
+      </p:pic>
+    </p:spTree>
+    <p:extLst>
+      <p:ext uri="{BB962C8B-B14F-4D97-AF65-F5344CB8AC3E}">
+        <p14:creationId xmlns:p14="http://schemas.microsoft.com/office/powerpoint/2010/main" val="4093182167"/>
+      </p:ext>
+    </p:extLst>
+  </p:cSld>
+  <p:clrMapOvr>
+    <a:masterClrMapping/>
+  </p:clrMapOvr>
+</p:sld>
+</file>
+
+<file path=ppt/slides/slide25.xml><?xml version="1.0" encoding="utf-8"?>
+<p:sld xmlns:a="http://schemas.openxmlformats.org/drawingml/2006/main" xmlns:r="http://schemas.openxmlformats.org/officeDocument/2006/relationships" xmlns:p="http://schemas.openxmlformats.org/presentationml/2006/main">
+  <p:cSld>
+    <p:spTree>
+      <p:nvGrpSpPr>
+        <p:cNvPr id="1" name=""/>
+        <p:cNvGrpSpPr/>
+        <p:nvPr/>
+      </p:nvGrpSpPr>
+      <p:grpSpPr>
+        <a:xfrm>
+          <a:off x="0" y="0"/>
+          <a:ext cx="0" cy="0"/>
+          <a:chOff x="0" y="0"/>
+          <a:chExt cx="0" cy="0"/>
+        </a:xfrm>
+      </p:grpSpPr>
+      <p:sp>
+        <p:nvSpPr>
+          <p:cNvPr id="2" name="TextBox 1"/>
+          <p:cNvSpPr txBox="1"/>
+          <p:nvPr/>
+        </p:nvSpPr>
+        <p:spPr>
+          <a:xfrm>
+            <a:off x="2286000" y="609600"/>
+            <a:ext cx="7867650" cy="584775"/>
+          </a:xfrm>
+          <a:prstGeom prst="rect">
+            <a:avLst/>
+          </a:prstGeom>
+          <a:noFill/>
+        </p:spPr>
+        <p:txBody>
+          <a:bodyPr wrap="square" rtlCol="0">
+            <a:spAutoFit/>
+          </a:bodyPr>
+          <a:lstStyle/>
+          <a:p>
+            <a:pPr algn="ctr"/>
+            <a:r>
+              <a:rPr lang="ru-RU" sz="3200" b="1" dirty="0"/>
+              <a:t>ЗАКЛЮЧЕНИЕ</a:t>
+            </a:r>
+          </a:p>
+        </p:txBody>
+      </p:sp>
+      <p:sp>
+        <p:nvSpPr>
+          <p:cNvPr id="4" name="Прямоугольник 3"/>
+          <p:cNvSpPr/>
+          <p:nvPr/>
+        </p:nvSpPr>
+        <p:spPr>
+          <a:xfrm>
+            <a:off x="1307939" y="2274838"/>
+            <a:ext cx="10052148" cy="3046988"/>
+          </a:xfrm>
+          <a:prstGeom prst="rect">
+            <a:avLst/>
+          </a:prstGeom>
+        </p:spPr>
+        <p:txBody>
+          <a:bodyPr wrap="square">
+            <a:spAutoFit/>
+          </a:bodyPr>
+          <a:lstStyle/>
+          <a:p>
+            <a:r>
+              <a:rPr lang="ru-RU" sz="2400" dirty="0" smtClean="0"/>
+              <a:t>В заключение курсовой работы по теме «Проектирование ИС ресторана "67 Небо"» можно отметить, что была разработана система, предоставляющая клиентам возможность удобного бронирования столиков через интерактивную карту и участия в автоматизированной программе лояльности. Разработка этой информационной системы представляет собой важный шаг в </a:t>
+            </a:r>
+            <a:r>
+              <a:rPr lang="ru-RU" sz="2400" dirty="0" err="1" smtClean="0"/>
+              <a:t>цифровизации</a:t>
+            </a:r>
+            <a:r>
+              <a:rPr lang="ru-RU" sz="2400" dirty="0" smtClean="0"/>
+              <a:t> ресторанного бизнеса, обеспечивая гостям современный сервис, а заведению - эффективный инструмент управления бронированием и клиентской базой.</a:t>
+            </a:r>
+            <a:endParaRPr lang="ru-RU" sz="2400" i="1" dirty="0">
+              <a:effectLst/>
+              <a:ea typeface="Times New Roman" panose="02020603050405020304" pitchFamily="18" charset="0"/>
+            </a:endParaRPr>
+          </a:p>
+        </p:txBody>
+      </p:sp>
+    </p:spTree>
+    <p:extLst>
+      <p:ext uri="{BB962C8B-B14F-4D97-AF65-F5344CB8AC3E}">
+        <p14:creationId xmlns:p14="http://schemas.microsoft.com/office/powerpoint/2010/main" val="2110265161"/>
+      </p:ext>
+    </p:extLst>
+  </p:cSld>
+  <p:clrMapOvr>
+    <a:masterClrMapping/>
+  </p:clrMapOvr>
+</p:sld>
+</file>
+
+<file path=ppt/slides/slide26.xml><?xml version="1.0" encoding="utf-8"?>
+<p:sld xmlns:a="http://schemas.openxmlformats.org/drawingml/2006/main" xmlns:r="http://schemas.openxmlformats.org/officeDocument/2006/relationships" xmlns:p="http://schemas.openxmlformats.org/presentationml/2006/main">
+  <p:cSld>
+    <p:spTree>
+      <p:nvGrpSpPr>
+        <p:cNvPr id="1" name=""/>
+        <p:cNvGrpSpPr/>
+        <p:nvPr/>
+      </p:nvGrpSpPr>
+      <p:grpSpPr>
+        <a:xfrm>
+          <a:off x="0" y="0"/>
+          <a:ext cx="0" cy="0"/>
+          <a:chOff x="0" y="0"/>
+          <a:chExt cx="0" cy="0"/>
+        </a:xfrm>
+      </p:grpSpPr>
+      <p:sp>
+        <p:nvSpPr>
+          <p:cNvPr id="2" name="TextBox 1"/>
+          <p:cNvSpPr txBox="1"/>
+          <p:nvPr/>
+        </p:nvSpPr>
+        <p:spPr>
+          <a:xfrm>
+            <a:off x="2271487" y="2975428"/>
+            <a:ext cx="7867650" cy="707886"/>
+          </a:xfrm>
+          <a:prstGeom prst="rect">
+            <a:avLst/>
+          </a:prstGeom>
+          <a:noFill/>
+        </p:spPr>
+        <p:txBody>
+          <a:bodyPr wrap="square" rtlCol="0">
+            <a:spAutoFit/>
+          </a:bodyPr>
+          <a:lstStyle/>
+          <a:p>
+            <a:pPr algn="ctr"/>
+            <a:r>
+              <a:rPr lang="ru-RU" sz="4000" b="1" dirty="0"/>
+              <a:t>СПАСИБО ЗА ВНИМАНИЕ!</a:t>
+            </a:r>
+          </a:p>
+        </p:txBody>
+      </p:sp>
+    </p:spTree>
+    <p:extLst>
+      <p:ext uri="{BB962C8B-B14F-4D97-AF65-F5344CB8AC3E}">
+        <p14:creationId xmlns:p14="http://schemas.microsoft.com/office/powerpoint/2010/main" val="3276542283"/>
       </p:ext>
     </p:extLst>
   </p:cSld>
@@ -5376,10 +5947,6 @@
               </a:rPr>
               <a:t>Разработать функциональную модель предметной области.</a:t>
             </a:r>
-            <a:endParaRPr lang="ru-RU" sz="2400" dirty="0">
-              <a:latin typeface="Times New Roman" panose="02020603050405020304" pitchFamily="18" charset="0"/>
-              <a:cs typeface="Times New Roman" panose="02020603050405020304" pitchFamily="18" charset="0"/>
-            </a:endParaRPr>
           </a:p>
         </p:txBody>
       </p:sp>
